--- a/olive_young_proposal_SLOBODA.pptx
+++ b/olive_young_proposal_SLOBODA.pptx
@@ -8694,13 +8694,13 @@
                         </a:spcAft>
                       </a:pPr>
                       <a:r>
-                        <a:rPr sz="700" b="1">
+                        <a:rPr sz="700">
                           <a:solidFill>
-                            <a:srgbClr val="1F3864"/>
+                            <a:srgbClr val="212121"/>
                           </a:solidFill>
                           <a:latin typeface="맑은 고딕"/>
                         </a:rPr>
-                        <a:t>[계약·정산 주체 확정 = 협상의 전제]</a:t>
+                        <a:t>제이아이에스 주식회사 (JIS Co., Ltd.)</a:t>
                       </a:r>
                     </a:p>
                     <a:p>
@@ -8719,7 +8719,7 @@
                           </a:solidFill>
                           <a:latin typeface="맑은 고딕"/>
                         </a:rPr>
-                        <a:t>· 화장품책임판매업자(계약·세금계산서 발행 주체): (주)[기입] / 사업자등록번호 [기입] / 책임판매업 등록번호 [기입]</a:t>
+                        <a:t>· 대표: 곽기성 / 소재지: 대구광역시 수성구 달구벌대로 2436</a:t>
                       </a:r>
                     </a:p>
                     <a:p>
@@ -8738,7 +8738,7 @@
                           </a:solidFill>
                           <a:latin typeface="맑은 고딕"/>
                         </a:rPr>
-                        <a:t>· 제조업자(OEM): 허니스트 (CGMP 적합·ISO22716 인증 여부 [확인·명기])</a:t>
+                        <a:t>· 화장품책임판매업 등록번호·사업자등록번호 [기입]</a:t>
                       </a:r>
                     </a:p>
                     <a:p>
@@ -8757,26 +8757,7 @@
                           </a:solidFill>
                           <a:latin typeface="맑은 고딕"/>
                         </a:rPr>
-                        <a:t>· 상표권: 'SLOBODA' 출원/등록번호 [기입] — 브랜드 소유권 확정</a:t>
-                      </a:r>
-                    </a:p>
-                    <a:p>
-                      <a:pPr algn="l">
-                        <a:lnSpc>
-                          <a:spcPct val="100000"/>
-                        </a:lnSpc>
-                        <a:spcAft>
-                          <a:spcPts val="100"/>
-                        </a:spcAft>
-                      </a:pPr>
-                      <a:r>
-                        <a:rPr sz="600">
-                          <a:solidFill>
-                            <a:srgbClr val="777777"/>
-                          </a:solidFill>
-                          <a:latin typeface="맑은 고딕"/>
-                        </a:rPr>
-                        <a:t>※ '와디즈 운영 표기명(슬로보다 코스메틱)'은 유통 표기일 뿐, MD의 계약 상대는 위 책임판매법인. 이건 협상이 아니라 신원 확인.</a:t>
+                        <a:t>· 제조(OEM): 허니스트</a:t>
                       </a:r>
                     </a:p>
                   </a:txBody>
@@ -8951,7 +8932,7 @@
                           </a:solidFill>
                           <a:latin typeface="맑은 고딕"/>
                         </a:rPr>
-                        <a:t>· 네이밍: 슬라브어 '자유(freedom)' → '스킨케어 단계로부터의 자유' — 크림 하나로 끝내는 데일리 장벽 케어 (브랜드명–컨셉–소구를 한 줄로 관통). 공식 브랜드 서사 확정 [기입]</a:t>
+                        <a:t>· 슬로건: "당신의 피부가 가장 자유로워지는 순간 — 단순한 진정이 아닌, 피부에 남는 회복의 힘"</a:t>
                       </a:r>
                     </a:p>
                     <a:p>
@@ -8970,7 +8951,7 @@
                           </a:solidFill>
                           <a:latin typeface="맑은 고딕"/>
                         </a:rPr>
-                        <a:t>· 대표 라인: No.7 리커버리(Recovery) — 히어로 단일 SKU</a:t>
+                        <a:t>· 네이밍: 슬라브어 '자유(Sloboda)' — 복잡한 스킨케어 단계로부터의 자유, 크림 하나로 끝내는 데일리 장벽 케어</a:t>
                       </a:r>
                     </a:p>
                     <a:p>
@@ -8989,26 +8970,7 @@
                           </a:solidFill>
                           <a:latin typeface="맑은 고딕"/>
                         </a:rPr>
-                        <a:t>· 제안 태그라인(심의 안전형): "병풀잎수 베이스 처방, [○○기관] 인체적용시험 비자극 판정(자극지수 0.00) — 시술 후 매일 쓰는 데일리 장벽 크림"</a:t>
-                      </a:r>
-                    </a:p>
-                    <a:p>
-                      <a:pPr algn="l">
-                        <a:lnSpc>
-                          <a:spcPct val="100000"/>
-                        </a:lnSpc>
-                        <a:spcAft>
-                          <a:spcPts val="100"/>
-                        </a:spcAft>
-                      </a:pPr>
-                      <a:r>
-                        <a:rPr sz="600">
-                          <a:solidFill>
-                            <a:srgbClr val="777777"/>
-                          </a:solidFill>
-                          <a:latin typeface="맑은 고딕"/>
-                        </a:rPr>
-                        <a:t>※ '자극지수 0.00'은 단독 슬로건 금지. 반드시 기관·시험번호 각주와 세트로만 노출.</a:t>
+                        <a:t>· 대표 제품: No.7 리커버리 크림 (히어로 단일 SKU)</a:t>
                       </a:r>
                     </a:p>
                   </a:txBody>
@@ -9183,7 +9145,7 @@
                           </a:solidFill>
                           <a:latin typeface="맑은 고딕"/>
                         </a:rPr>
-                        <a:t>더마코스메틱 / 시카(병풀)·피부장벽·진정 데일리 크림</a:t>
+                        <a:t>더마코스메틱 / 시카(병풀) 진정·피부장벽 데일리 크림</a:t>
                       </a:r>
                       <a:endParaRPr lang="ko-KR" altLang="en-US" sz="1050" b="0" i="0" u="none" strike="noStrike" dirty="0">
                         <a:solidFill>
@@ -9212,7 +9174,7 @@
                           </a:solidFill>
                           <a:latin typeface="맑은 고딕"/>
                         </a:rPr>
-                        <a:t>· 핵심 소구축(레드오션 회피): 함량 경쟁이 아니라 '안전성 정량화(임상 자극 수치)' + '시술 후 리커버리' 사용맥락</a:t>
+                        <a:t>· 소구: 함량 % 경쟁이 아닌 '임상 자극지수 0.00' 안전성 정량화 + 시술 후 홈케어 사용맥락</a:t>
                       </a:r>
                     </a:p>
                     <a:p>
@@ -9232,25 +9194,6 @@
                           <a:latin typeface="맑은 고딕"/>
                         </a:rPr>
                         <a:t>· 올리브영 매칭: 스킨케어 &gt; 크림 &gt; 더마·진정(시카) 존 / '시술후케어' 검색 슬롯</a:t>
-                      </a:r>
-                    </a:p>
-                    <a:p>
-                      <a:pPr algn="l">
-                        <a:lnSpc>
-                          <a:spcPct val="100000"/>
-                        </a:lnSpc>
-                        <a:spcAft>
-                          <a:spcPts val="100"/>
-                        </a:spcAft>
-                      </a:pPr>
-                      <a:r>
-                        <a:rPr sz="600">
-                          <a:solidFill>
-                            <a:srgbClr val="777777"/>
-                          </a:solidFill>
-                          <a:latin typeface="맑은 고딕"/>
-                        </a:rPr>
-                        <a:t>※ '재생'은 화장품 표시광고 심의 단골 지적어 — 카테고리·소구에서 '진정·보습·피부장벽 케어'로 통일.</a:t>
                       </a:r>
                     </a:p>
                   </a:txBody>
@@ -9414,7 +9357,7 @@
                           </a:solidFill>
                           <a:latin typeface="맑은 고딕"/>
                         </a:rPr>
-                        <a:t>· 1차(전면화): 미용시술 후 진정·홈케어 수요층 — 시술비 20~30만원 지출 뒤 4.3만원 홈케어는 '저렴한 마무리'. 지불의향이 가장 높고 가격저항이 가장 낮은 앵커 카테고리</a:t>
+                        <a:t>· 1차: 미용시술 후 진정·홈케어 수요층 — 병원 클리닉 현장에서 확인된 실수요(제품 개발의 출발점). 시술비 20~30만원 뒤 4.3만원 홈케어는 '저렴한 마무리' = 가격저항 최저 지불층</a:t>
                       </a:r>
                     </a:p>
                     <a:p>
@@ -9433,7 +9376,7 @@
                           </a:solidFill>
                           <a:latin typeface="맑은 고딕"/>
                         </a:rPr>
-                        <a:t>· 2차: 민감성 자기인식 소비자 20~40대 (인용 통계는 1차 출처 명기 후에만 사용 [기입])</a:t>
+                        <a:t>· 2차: 민감성 자기인식 소비자 20~40대</a:t>
                       </a:r>
                     </a:p>
                     <a:p>
@@ -9471,7 +9414,7 @@
                           </a:solidFill>
                           <a:latin typeface="맑은 고딕"/>
                         </a:rPr>
-                        <a:t>※ 우선순위를 '민감성 일반'에서 '시술후 리커버리'로 상향 — 43,000원을 정당화하는 지불층을 앞세워 가격 프레임을 이동.</a:t>
+                        <a:t>※ 실구매 리뷰에 '레이저 시술 후' 사용 후기 존재 — 타깃 적합성이 소비자 리뷰로 실증됨</a:t>
                       </a:r>
                     </a:p>
                   </a:txBody>
@@ -9660,7 +9603,7 @@
                           </a:solidFill>
                           <a:latin typeface="맑은 고딕"/>
                         </a:rPr>
-                        <a:t>· 네이버 스마트스토어(SLOBODA 공식몰): 43,000원(정가 48,000원) — 누적 판매·리뷰·평점·재구매율 [기입, 회전율 증명의 핵심]</a:t>
+                        <a:t>· 병원 클리닉: 시술 후 홈케어로 판매 중 (브랜드가 탄생한 채널, 납품처 확대 협의 중)</a:t>
                       </a:r>
                       <a:endParaRPr lang="ko-KR" altLang="en-US" sz="1050" b="0" i="0" u="none" strike="noStrike" dirty="0">
                         <a:solidFill>
@@ -9689,7 +9632,7 @@
                           </a:solidFill>
                           <a:latin typeface="맑은 고딕"/>
                         </a:rPr>
-                        <a:t>· 쿠팡: No.7 병풀 리커버리 크림 50ml — 등록명 내 'EGF/재생' 표현은 정식 성분명·'진정' 표현으로 정정 예정(심의)</a:t>
+                        <a:t>· 네이버 스마트스토어(공식몰): 43,000원(정가 48,000원) — 리뷰 57건·평점 5.0, 관심고객 373명</a:t>
                       </a:r>
                     </a:p>
                     <a:p>
@@ -9708,7 +9651,7 @@
                           </a:solidFill>
                           <a:latin typeface="맑은 고딕"/>
                         </a:rPr>
-                        <a:t>· 와디즈 #408720: 달성률·후원자 수 [기입] — 강한 수치일 때만 실적으로 노출, 약하면 삭제(할인 리워드 수요는 가격저항 증거로 역해석될 수 있음)</a:t>
+                        <a:t>· 쿠팡: 판매 중 / · 에이블리: 판매 중</a:t>
                       </a:r>
                     </a:p>
                     <a:p>
@@ -9727,7 +9670,7 @@
                           </a:solidFill>
                           <a:latin typeface="맑은 고딕"/>
                         </a:rPr>
-                        <a:t>· 병원(피부과 등) B2B: '시술 후 홈케어용으로 병원 채널에 공급'. 납품처 수·거래명세 [기입]</a:t>
+                        <a:t>· 와디즈: 펀딩 목표 대비 114% 달성 (초기 수요 검증)</a:t>
                       </a:r>
                     </a:p>
                     <a:p>
@@ -9740,13 +9683,13 @@
                         </a:spcAft>
                       </a:pPr>
                       <a:r>
-                        <a:rPr sz="600">
+                        <a:rPr sz="700">
                           <a:solidFill>
-                            <a:srgbClr val="777777"/>
+                            <a:srgbClr val="212121"/>
                           </a:solidFill>
                           <a:latin typeface="맑은 고딕"/>
                         </a:rPr>
-                        <a:t>※ '피부과가 먼저 선택/추천' 표현 금지(의료인 추천 오인). 거래명세로 뒷받침 안 되면 병원 문구 전면 삭제.</a:t>
+                        <a:t>· 판매 채널 지속 확대 진행 중</a:t>
                       </a:r>
                     </a:p>
                   </a:txBody>
@@ -9951,7 +9894,7 @@
                           </a:solidFill>
                           <a:latin typeface="맑은 고딕"/>
                         </a:rPr>
-                        <a:t>· 현재 해외 공식 입점: 없음 (초기 단계)</a:t>
+                        <a:t>· 현재 해외 공식 입점: 없음 — 해외 진출 준비 중</a:t>
                       </a:r>
                     </a:p>
                     <a:p>
@@ -9970,7 +9913,7 @@
                           </a:solidFill>
                           <a:latin typeface="맑은 고딕"/>
                         </a:rPr>
-                        <a:t>· 계획: 국내 온라인 회전율 증명 후 → 올리브영 글로벌몰(역직구) 기획전으로 인바운드 외국인 수요 흡수</a:t>
+                        <a:t>· 1단계: 올리브영 글로벌몰(역직구) 연계로 인바운드·해외 수요 검증 희망</a:t>
                       </a:r>
                     </a:p>
                     <a:p>
@@ -9989,26 +9932,7 @@
                           </a:solidFill>
                           <a:latin typeface="맑은 고딕"/>
                         </a:rPr>
-                        <a:t>· 확장 논리: 병풀잎수 베이스 + 임상 비자극은 외국인 구매 이유가 명확 → 글로벌몰 적합</a:t>
-                      </a:r>
-                    </a:p>
-                    <a:p>
-                      <a:pPr algn="l">
-                        <a:lnSpc>
-                          <a:spcPct val="100000"/>
-                        </a:lnSpc>
-                        <a:spcAft>
-                          <a:spcPts val="100"/>
-                        </a:spcAft>
-                      </a:pPr>
-                      <a:r>
-                        <a:rPr sz="600">
-                          <a:solidFill>
-                            <a:srgbClr val="777777"/>
-                          </a:solidFill>
-                          <a:latin typeface="맑은 고딕"/>
-                        </a:rPr>
-                        <a:t>※ 해외는 국내 실적 확보 후 단계 — 현 제안의 핵심 범위 아님(과확장 자제).</a:t>
+                        <a:t>· 확장 논리: 병풀잎수 베이스 + 임상 비자극(0.00)은 K-더마 수출 소구와 정확히 정합</a:t>
                       </a:r>
                     </a:p>
                   </a:txBody>
@@ -10239,26 +10163,7 @@
                           </a:solidFill>
                           <a:latin typeface="맑은 고딕"/>
                         </a:rPr>
-                        <a:t>· 와디즈 캠페인: https://www.wadiz.kr/web/campaign/detail/408720</a:t>
-                      </a:r>
-                    </a:p>
-                    <a:p>
-                      <a:pPr algn="l">
-                        <a:lnSpc>
-                          <a:spcPct val="100000"/>
-                        </a:lnSpc>
-                        <a:spcAft>
-                          <a:spcPts val="100"/>
-                        </a:spcAft>
-                      </a:pPr>
-                      <a:r>
-                        <a:rPr sz="600">
-                          <a:solidFill>
-                            <a:srgbClr val="777777"/>
-                          </a:solidFill>
-                          <a:latin typeface="맑은 고딕"/>
-                        </a:rPr>
-                        <a:t>※ 제안서 첨부 필수(없으면 미완성 서류): 제품 이미지 4종 + 인체적용시험 성적서 원문 + 전성분표/배합의도서.</a:t>
+                        <a:t>· 와디즈: https://www.wadiz.kr/web/campaign/detail/408720</a:t>
                       </a:r>
                     </a:p>
                   </a:txBody>
@@ -10537,7 +10442,7 @@
                           </a:solidFill>
                           <a:latin typeface="맑은 고딕"/>
                         </a:rPr>
-                        <a:t>· 화장품책임판매업 등록번호 [기입] / 제조: 허니스트 (CGMP 적합·ISO22716 [확인])</a:t>
+                        <a:t>· 병원 클리닉에서 시술 후 피부 고민 상담을 바탕으로 개발 — '시술 직후에도 매일 바를 수 있는 크림'이 목표</a:t>
                       </a:r>
                       <a:endParaRPr lang="en-US" altLang="ko-KR" sz="1050" b="0" i="0" u="none" strike="noStrike" kern="1200" dirty="0">
                         <a:solidFill>
@@ -10567,7 +10472,7 @@
                           </a:solidFill>
                           <a:latin typeface="맑은 고딕"/>
                         </a:rPr>
-                        <a:t>· 설립연도·법인 연혁·제품(No.7) 출시일 [기입] — 협상이 아닌 '존재 증명' 필수 항목</a:t>
+                        <a:t>· 일반·민감성 이중 일차자극 인체적용시험 완료: 두 시험 모두 자극지수 0.00 '비자극성(Excellent)' 판정</a:t>
                       </a:r>
                     </a:p>
                     <a:p>
@@ -10586,7 +10491,7 @@
                           </a:solidFill>
                           <a:latin typeface="맑은 고딕"/>
                         </a:rPr>
-                        <a:t>· 브랜드 origin(MD가 반응하는 축): 창업자가 왜 '시술 후 진정 크림'을 만들었나 — 개인 서사·병원 협업 계기 3~4문장 [기입]</a:t>
+                        <a:t>  (보고서 No. HM-IR0089-06 일반 / HM-IR0088-68 민감성 · Finn Chamber® 24h 첩포 · 피부과전문의 판정 — 성적서 원문 첨부)</a:t>
                       </a:r>
                     </a:p>
                     <a:p>
@@ -10605,7 +10510,7 @@
                           </a:solidFill>
                           <a:latin typeface="맑은 고딕"/>
                         </a:rPr>
-                        <a:t>· 검증 사실: 일반+민감성 이중 일차자극 인체적용시험, 두 시험 모두 비자극 판정(자극지수 0.00). 시험기관/번호/피험자 수(n) [기입 — 이게 없으면 '0.00' 훅 자체가 무효]</a:t>
+                        <a:t>· 병원 판매 개시 → 와디즈 114% 달성 → 네이버·쿠팡·에이블리 D2C 확장 (No.7 출시일 [기입])</a:t>
                       </a:r>
                     </a:p>
                     <a:p>
@@ -10624,7 +10529,7 @@
                           </a:solidFill>
                           <a:latin typeface="맑은 고딕"/>
                         </a:rPr>
-                        <a:t>· 포지셔닝: 병원 채널 공급 → D2C(네이버·쿠팡·와디즈) 확장한 초기 더마 브랜드</a:t>
+                        <a:t>· 상표 'SLOBODA' 출원/등록번호 [기입]</a:t>
                       </a:r>
                     </a:p>
                   </a:txBody>
@@ -11604,7 +11509,7 @@
                           </a:solidFill>
                           <a:latin typeface="맑은 고딕"/>
                         </a:rPr>
-                        <a:t>· "스킨케어 단계로부터의 자유" — SLOBODA(슬라브어 '자유')의 이름처럼, 크림 하나로 끝내는 미니멀 데일리 장벽 케어 더마 브랜드</a:t>
+                        <a:t>· "당신의 피부가 가장 자유로워지는 순간" — 크림 하나로 끝내는 미니멀 데일리 장벽 케어 더마 브랜드</a:t>
                       </a:r>
                     </a:p>
                     <a:p>
@@ -11642,7 +11547,7 @@
                           </a:solidFill>
                           <a:latin typeface="맑은 고딕"/>
                         </a:rPr>
-                        <a:t>[핵심 자산 2가지 — 심의 안전형으로 재정의]</a:t>
+                        <a:t>[탄생 스토리 — 병원에서 시작된 브랜드]</a:t>
                       </a:r>
                     </a:p>
                     <a:p>
@@ -11661,7 +11566,7 @@
                           </a:solidFill>
                           <a:latin typeface="맑은 고딕"/>
                         </a:rPr>
-                        <a:t>· ① 안전성을 '숫자'로 증명: [○○기관] 일반+민감성 이중 인체적용시험, 두 시험 모두 비자극(자극지수 0.00) 판정 (기관·번호·피험자수 각주 필수). 남들의 '저자극 테스트 완료' 정성 표기와 달리 정량 임상</a:t>
+                        <a:t>· 병원 클리닉의 시술 후 피부 고민 상담에서 출발. 시술 직후의 예민한 피부도 매일 부담 없이 바를 수 있는 크림을 목표로 개발, 현재 병원에서 실제 판매 중</a:t>
                       </a:r>
                     </a:p>
                     <a:p>
@@ -11680,7 +11585,7 @@
                           </a:solidFill>
                           <a:latin typeface="맑은 고딕"/>
                         </a:rPr>
-                        <a:t>· ② 병풀잎수 베이스 처방: 정제수 대신 병풀잎수를 베이스로 사용(전성분표·배합의도서 원문 제출). 카피는 '유효성분 50% 효능'이 아닌 '함량·처방 사실'로만 표기 — 표시광고 심의 준수</a:t>
+                        <a:t>· 광고로 신뢰를 '사는' 순서의 역방향 — 전문가 채널에서 먼저 검증받고 D2C로 확장하는 구조</a:t>
                       </a:r>
                     </a:p>
                     <a:p>
@@ -11718,7 +11623,7 @@
                           </a:solidFill>
                           <a:latin typeface="맑은 고딕"/>
                         </a:rPr>
-                        <a:t>[히스토리·신뢰 구조]</a:t>
+                        <a:t>[핵심 자산 ① 안전성을 '숫자'로 증명]</a:t>
                       </a:r>
                     </a:p>
                     <a:p>
@@ -11737,7 +11642,7 @@
                           </a:solidFill>
                           <a:latin typeface="맑은 고딕"/>
                         </a:rPr>
-                        <a:t>· 광고로 신뢰를 '사는' 순서의 역방향 — '시술 후 홈케어용'으로 병원 채널에 먼저 공급된 뒤 D2C로 대중화 (납품처 거래명세로 물증화 [기입], 못 대면 이 스토리 삭제)</a:t>
+                        <a:t>· 일반+민감성 이중 인체적용시험 모두 자극지수 0.00 비자극성(Excellent) — 보고서 No. HM-IR0089-06 / HM-IR0088-68, 피부과전문의 판정 (성적서 원문 첨부)</a:t>
                       </a:r>
                     </a:p>
                     <a:p>
@@ -11756,7 +11661,7 @@
                           </a:solidFill>
                           <a:latin typeface="맑은 고딕"/>
                         </a:rPr>
-                        <a:t>· 창업 계기·origin 3~4문장 [기입] — MD는 '왜 이 사람이 이걸 만들었나'에 반응</a:t>
+                        <a:t>· '순한 편'이라는 정성 표기가 아닌 정량 임상 — 표시광고 심의 안전형 소구</a:t>
                       </a:r>
                     </a:p>
                     <a:p>
@@ -11794,7 +11699,7 @@
                           </a:solidFill>
                           <a:latin typeface="맑은 고딕"/>
                         </a:rPr>
-                        <a:t>[경쟁 대비 차별점 — 좁혀서 증명]</a:t>
+                        <a:t>[핵심 자산 ② 병풀잎수 베이스 처방]</a:t>
                       </a:r>
                     </a:p>
                     <a:p>
@@ -11813,7 +11718,7 @@
                           </a:solidFill>
                           <a:latin typeface="맑은 고딕"/>
                         </a:rPr>
-                        <a:t>· 소구축 이동: 모두가 하는 '성분 % 경쟁'(레드오션)에서 벗어나 '자극 수치를 전면에 건 국산 시카 크림'(상대적 블루오션)으로</a:t>
+                        <a:t>· 병풀잎수 500,000ppm — 함량·처방 '사실'로만 표기 (전성분표·배합 근거 제출 가능)</a:t>
                       </a:r>
                     </a:p>
                     <a:p>
@@ -11832,7 +11737,26 @@
                           </a:solidFill>
                           <a:latin typeface="맑은 고딕"/>
                         </a:rPr>
-                        <a:t>· '공백'이 아니라 '이 조합은 없음': 4만원대 국산 시카 크림은 이미 존재하나(닥터지·아누아·토리든 등), [병풀잎수 베이스 처방 + 일반·민감성 이중 임상 + 시술후 리커버리 소구]의 교집합은 부재 → 경쟁 SKU 비교표로 증명(product_lineup 참조)</a:t>
+                        <a:t/>
+                      </a:r>
+                    </a:p>
+                    <a:p>
+                      <a:pPr algn="l">
+                        <a:lnSpc>
+                          <a:spcPct val="100000"/>
+                        </a:lnSpc>
+                        <a:spcAft>
+                          <a:spcPts val="100"/>
+                        </a:spcAft>
+                      </a:pPr>
+                      <a:r>
+                        <a:rPr sz="750" b="1">
+                          <a:solidFill>
+                            <a:srgbClr val="1F3864"/>
+                          </a:solidFill>
+                          <a:latin typeface="맑은 고딕"/>
+                        </a:rPr>
+                        <a:t>[소비자 검증 — 작지만 정확한 신호]</a:t>
                       </a:r>
                     </a:p>
                     <a:p>
@@ -11851,7 +11775,83 @@
                           </a:solidFill>
                           <a:latin typeface="맑은 고딕"/>
                         </a:rPr>
-                        <a:t>· 단일 히어로 SKU 서사에 집중 (라인 확장은 실적 달성 후 논의)</a:t>
+                        <a:t>· 평점 5.0 (리뷰 57건, 최근 6개월 5.0) · '촉촉함' 96% · 리뷰 키워드: 자극적이지 않아요/흡수가 잘 돼요/발림성 좋아요/끈적임 없어요</a:t>
+                      </a:r>
+                    </a:p>
+                    <a:p>
+                      <a:pPr algn="l">
+                        <a:lnSpc>
+                          <a:spcPct val="100000"/>
+                        </a:lnSpc>
+                        <a:spcAft>
+                          <a:spcPts val="100"/>
+                        </a:spcAft>
+                      </a:pPr>
+                      <a:r>
+                        <a:rPr sz="750">
+                          <a:solidFill>
+                            <a:srgbClr val="212121"/>
+                          </a:solidFill>
+                          <a:latin typeface="맑은 고딕"/>
+                        </a:rPr>
+                        <a:t>· 브랜드가 설계한 소구와 소비자 언어가 정확히 일치 — '레이저 시술 후' 실사용 후기 존재</a:t>
+                      </a:r>
+                    </a:p>
+                    <a:p>
+                      <a:pPr algn="l">
+                        <a:lnSpc>
+                          <a:spcPct val="100000"/>
+                        </a:lnSpc>
+                        <a:spcAft>
+                          <a:spcPts val="100"/>
+                        </a:spcAft>
+                      </a:pPr>
+                      <a:r>
+                        <a:rPr sz="750">
+                          <a:solidFill>
+                            <a:srgbClr val="212121"/>
+                          </a:solidFill>
+                          <a:latin typeface="맑은 고딕"/>
+                        </a:rPr>
+                        <a:t/>
+                      </a:r>
+                    </a:p>
+                    <a:p>
+                      <a:pPr algn="l">
+                        <a:lnSpc>
+                          <a:spcPct val="100000"/>
+                        </a:lnSpc>
+                        <a:spcAft>
+                          <a:spcPts val="100"/>
+                        </a:spcAft>
+                      </a:pPr>
+                      <a:r>
+                        <a:rPr sz="750" b="1">
+                          <a:solidFill>
+                            <a:srgbClr val="1F3864"/>
+                          </a:solidFill>
+                          <a:latin typeface="맑은 고딕"/>
+                        </a:rPr>
+                        <a:t>[경쟁 대비 차별점]</a:t>
+                      </a:r>
+                    </a:p>
+                    <a:p>
+                      <a:pPr algn="l">
+                        <a:lnSpc>
+                          <a:spcPct val="100000"/>
+                        </a:lnSpc>
+                        <a:spcAft>
+                          <a:spcPts val="100"/>
+                        </a:spcAft>
+                      </a:pPr>
+                      <a:r>
+                        <a:rPr sz="750">
+                          <a:solidFill>
+                            <a:srgbClr val="212121"/>
+                          </a:solidFill>
+                          <a:latin typeface="맑은 고딕"/>
+                        </a:rPr>
+                        <a:t>· 4만원대 국산 시카크림은 존재하나, [병풀잎수 베이스 + 이중 임상 0.00 + 시술후 리커버리 + 병원 채널 검증]의 조합은 매대에 없음 → 기존 라인 잠식 없는 '순증'</a:t>
                       </a:r>
                     </a:p>
                   </a:txBody>
@@ -12007,7 +12007,7 @@
                           </a:solidFill>
                           <a:latin typeface="맑은 고딕"/>
                         </a:rPr>
-                        <a:t>[제안 범위 하향 = 채택확률↑]</a:t>
+                        <a:t>[제안 범위 — 저리스크 진입]</a:t>
                       </a:r>
                     </a:p>
                     <a:p>
@@ -12026,7 +12026,7 @@
                           </a:solidFill>
                           <a:latin typeface="맑은 고딕"/>
                         </a:rPr>
-                        <a:t>· 1차 목표를 '오프라인 전점'이 아닌 '온라인몰 단독 입점'으로 설정 — 데이터가 얇은 초기 브랜드가 MD 리스크를 낮춰 진입. 리스크 규정은 MD 몫임을 인정하고, 판단 가능한 최소 단위로 제안</a:t>
+                        <a:t>· 1차 목표: 오프라인 전점이 아닌 '올리브영 온라인몰 단독 입점' — 초기 브랜드가 MD 리스크를 낮춰 진입, 데이터로 다음 단계 판단</a:t>
                       </a:r>
                     </a:p>
                     <a:p>
@@ -12102,7 +12102,7 @@
                           </a:solidFill>
                           <a:latin typeface="맑은 고딕"/>
                         </a:rPr>
-                        <a:t>· 온라인몰 초도 리뷰 [목표 100건]을 브랜드 비용으로 확보 → 데이터 리스크를 브랜드가 짐</a:t>
+                        <a:t>· 현재 리뷰 57건 → 온라인몰 초도 리뷰 100건+ 를 브랜드 비용으로 확보 (데이터 리스크는 브랜드가 부담)</a:t>
                       </a:r>
                     </a:p>
                     <a:p>
@@ -12121,7 +12121,7 @@
                           </a:solidFill>
                           <a:latin typeface="맑은 고딕"/>
                         </a:rPr>
-                        <a:t>· 재구매율·평점 실데이터로 회전율 선증명 (현재 [기입]% → 목표 [기입]%)</a:t>
+                        <a:t>· 재구매율·평점 실데이터로 회전율 선증명 (재구매율 [기입]%)</a:t>
                       </a:r>
                     </a:p>
                     <a:p>
@@ -12178,7 +12178,7 @@
                           </a:solidFill>
                           <a:latin typeface="맑은 고딕"/>
                         </a:rPr>
-                        <a:t>· 온라인 지표 달성 시 오프라인 소수 매장(더마·진정존) 테스트</a:t>
+                        <a:t>· 온라인 지표 달성 시 더마·진정존 소수 매장 테스트</a:t>
                       </a:r>
                     </a:p>
                     <a:p>
@@ -12197,7 +12197,7 @@
                           </a:solidFill>
                           <a:latin typeface="맑은 고딕"/>
                         </a:rPr>
-                        <a:t>· 초도 2~3 SKU로 브랜드존 구성 = 히어로의 '용량 변주'(본품 50ml + 미니/트래블 + 리필) — 컨셉 훼손 없이 매대 슬롯·객단가 방어</a:t>
+                        <a:t>· 초도 2~3 SKU 구성 = 히어로의 용량 변주(본품 50ml + 미니/트래블 + 리필) — 컨셉 훼손 없이 매대 슬롯·객단가 방어</a:t>
                       </a:r>
                     </a:p>
                     <a:p>
@@ -12254,7 +12254,7 @@
                           </a:solidFill>
                           <a:latin typeface="맑은 고딕"/>
                         </a:rPr>
-                        <a:t>· 실적 근거로 전점 확대 + 글로벌몰 역직구 기획전</a:t>
+                        <a:t>· 실적 근거로 매장 확대 + 올리브영 글로벌몰(역직구)로 해외 진출 연계 — 해외 판매 계획의 첫 관문을 올리브영과 함께</a:t>
                       </a:r>
                     </a:p>
                     <a:p>
@@ -12273,7 +12273,7 @@
                           </a:solidFill>
                           <a:latin typeface="맑은 고딕"/>
                         </a:rPr>
-                        <a:t>· 신규 카테고리 라인 확장(리커버리 앰플·저자극 클렌저)은 '실적 달성 후 논의' 한 줄로만 — '크림 하나' 히어로 서사 유지</a:t>
+                        <a:t>· 리커버리 라인 확장(앰플·저자극 클렌저 등)은 실적 달성 후 논의 — '크림 하나' 히어로 서사 유지</a:t>
                       </a:r>
                     </a:p>
                   </a:txBody>
@@ -13013,7 +13013,7 @@
                           </a:solidFill>
                           <a:latin typeface="맑은 고딕"/>
                         </a:rPr>
-                        <a:t>[MD가 협상에서 쓸 실수치 — 우선순위대로 채움, 못 채우면 삭제]</a:t>
+                        <a:t>[소비자 지표 — 작지만 정확한 품질 신호 (캡처 첨부)]</a:t>
                       </a:r>
                     </a:p>
                     <a:p>
@@ -13032,7 +13032,7 @@
                           </a:solidFill>
                           <a:latin typeface="맑은 고딕"/>
                         </a:rPr>
-                        <a:t>· ① 재구매율 [기입]% — 더마 크림의 생명 지표. 20~30%+면 최강 무기 (최우선 확보)</a:t>
+                        <a:t>· 네이버 스마트스토어: 리뷰 57건 · 평점 5.0/5.0 (최근 6개월 5.0) · '촉촉함' 만족 96% · 관심고객 373명 · Q&amp;A 11건</a:t>
                       </a:r>
                     </a:p>
                     <a:p>
@@ -13051,7 +13051,7 @@
                           </a:solidFill>
                           <a:latin typeface="맑은 고딕"/>
                         </a:rPr>
-                        <a:t>· ② 네이버 리뷰 수·평균 평점 [기입] (예: 'OOO건·4.O점' 캡처 첨부) — [기입]보다 100배 강함</a:t>
+                        <a:t>· AI 리뷰 키워드 상위: 자극적이지 않아요 / 흡수가 잘 돼요 / 발림성 좋아요 / 끈적임 없어요 / 피부가 편안해요</a:t>
                       </a:r>
                     </a:p>
                     <a:p>
@@ -13070,45 +13070,7 @@
                           </a:solidFill>
                           <a:latin typeface="맑은 고딕"/>
                         </a:rPr>
-                        <a:t>· ③ 쿠팡 누적 판매·리뷰 [기입]</a:t>
-                      </a:r>
-                    </a:p>
-                    <a:p>
-                      <a:pPr algn="l">
-                        <a:lnSpc>
-                          <a:spcPct val="100000"/>
-                        </a:lnSpc>
-                        <a:spcAft>
-                          <a:spcPts val="100"/>
-                        </a:spcAft>
-                      </a:pPr>
-                      <a:r>
-                        <a:rPr sz="750">
-                          <a:solidFill>
-                            <a:srgbClr val="212121"/>
-                          </a:solidFill>
-                          <a:latin typeface="맑은 고딕"/>
-                        </a:rPr>
-                        <a:t>· ④ 와디즈 #408720 달성률·후원자 수 [기입] — 강하면 히어로로, 약하거나 없으면 삭제</a:t>
-                      </a:r>
-                    </a:p>
-                    <a:p>
-                      <a:pPr algn="l">
-                        <a:lnSpc>
-                          <a:spcPct val="100000"/>
-                        </a:lnSpc>
-                        <a:spcAft>
-                          <a:spcPts val="100"/>
-                        </a:spcAft>
-                      </a:pPr>
-                      <a:r>
-                        <a:rPr sz="750">
-                          <a:solidFill>
-                            <a:srgbClr val="212121"/>
-                          </a:solidFill>
-                          <a:latin typeface="맑은 고딕"/>
-                        </a:rPr>
-                        <a:t>· ⑤ 병원 납품처 수·재주문 실적 [기입] — 역방향 신뢰의 유일한 물증. 못 채우면 병원 스토리 전체 삭제</a:t>
+                        <a:t>· '레이저 시술 후 민감해진 피부에 사용' 실구매 후기 — 시술후 리커버리 포지셔닝의 소비자 실증</a:t>
                       </a:r>
                     </a:p>
                     <a:p>
@@ -13146,7 +13108,7 @@
                           </a:solidFill>
                           <a:latin typeface="맑은 고딕"/>
                         </a:rPr>
-                        <a:t>[정직 프레이밍(데이터가 얇을 때)]</a:t>
+                        <a:t>[채널 성과]</a:t>
                       </a:r>
                     </a:p>
                     <a:p>
@@ -13165,7 +13127,45 @@
                           </a:solidFill>
                           <a:latin typeface="맑은 고딕"/>
                         </a:rPr>
-                        <a:t>· "론칭 [O]개월 차 초기 브랜드로 절대 판매량은 작으나, 재구매율 [O]%·평점 [O.O]로 반복구매 신호 확인 — 인지도가 아닌 '전환 잠재력'으로 평가 요청"</a:t>
+                        <a:t>· 와디즈 캠페인: 펀딩 목표 대비 114% 달성 — 초기 수요 검증, 후속 펀딩 지속 예정</a:t>
+                      </a:r>
+                    </a:p>
+                    <a:p>
+                      <a:pPr algn="l">
+                        <a:lnSpc>
+                          <a:spcPct val="100000"/>
+                        </a:lnSpc>
+                        <a:spcAft>
+                          <a:spcPts val="100"/>
+                        </a:spcAft>
+                      </a:pPr>
+                      <a:r>
+                        <a:rPr sz="750">
+                          <a:solidFill>
+                            <a:srgbClr val="212121"/>
+                          </a:solidFill>
+                          <a:latin typeface="맑은 고딕"/>
+                        </a:rPr>
+                        <a:t>· 병원 클리닉: 시술 후 홈케어로 판매 중 (개발 출발 채널, 납품처 확대 협의 중)</a:t>
+                      </a:r>
+                    </a:p>
+                    <a:p>
+                      <a:pPr algn="l">
+                        <a:lnSpc>
+                          <a:spcPct val="100000"/>
+                        </a:lnSpc>
+                        <a:spcAft>
+                          <a:spcPts val="100"/>
+                        </a:spcAft>
+                      </a:pPr>
+                      <a:r>
+                        <a:rPr sz="750">
+                          <a:solidFill>
+                            <a:srgbClr val="212121"/>
+                          </a:solidFill>
+                          <a:latin typeface="맑은 고딕"/>
+                        </a:rPr>
+                        <a:t>· 쿠팡·에이블리 입점 판매 중 — 채널 다각화 진행</a:t>
                       </a:r>
                     </a:p>
                     <a:p>
@@ -13203,7 +13203,7 @@
                           </a:solidFill>
                           <a:latin typeface="맑은 고딕"/>
                         </a:rPr>
-                        <a:t>[품질·신뢰 크리덴셜 — 사실 확정 필요]</a:t>
+                        <a:t>[정직 프레이밍]</a:t>
                       </a:r>
                     </a:p>
                     <a:p>
@@ -13222,45 +13222,7 @@
                           </a:solidFill>
                           <a:latin typeface="맑은 고딕"/>
                         </a:rPr>
-                        <a:t>· 제조 허니스트 CGMP·ISO22716 [확인·명기] / 책임판매업 등록·생산물배상책임(PL)보험 가입 [기입] / 로트별 CoA·안정성(경시변화)·미생물 성적 상시 제출</a:t>
-                      </a:r>
-                    </a:p>
-                    <a:p>
-                      <a:pPr algn="l">
-                        <a:lnSpc>
-                          <a:spcPct val="100000"/>
-                        </a:lnSpc>
-                        <a:spcAft>
-                          <a:spcPts val="100"/>
-                        </a:spcAft>
-                      </a:pPr>
-                      <a:r>
-                        <a:rPr sz="750">
-                          <a:solidFill>
-                            <a:srgbClr val="212121"/>
-                          </a:solidFill>
-                          <a:latin typeface="맑은 고딕"/>
-                        </a:rPr>
-                        <a:t>· 검증 사실: 일반+민감성 이중 인체적용시험 비자극 판정(기관/번호/피험자수 [기입])</a:t>
-                      </a:r>
-                    </a:p>
-                    <a:p>
-                      <a:pPr algn="l">
-                        <a:lnSpc>
-                          <a:spcPct val="100000"/>
-                        </a:lnSpc>
-                        <a:spcAft>
-                          <a:spcPts val="100"/>
-                        </a:spcAft>
-                      </a:pPr>
-                      <a:r>
-                        <a:rPr sz="650">
-                          <a:solidFill>
-                            <a:srgbClr val="777777"/>
-                          </a:solidFill>
-                          <a:latin typeface="맑은 고딕"/>
-                        </a:rPr>
-                        <a:t>※ 원칙: 못 채우는 [기입]은 삭제해 밀도를 낮춘다 — 빈칸 15개보다 채워진 8개가 통과한다.</a:t>
+                        <a:t>· 론칭 초기 브랜드로 절대 판매량은 크지 않으나, 평점 5.0·리뷰 키워드·시술후 실사용 후기로 '전환 잠재력'을 증명 — 인지도가 아닌 품질·적합성으로 평가 요청 (누적 판매수량·재구매율 [기입])</a:t>
                       </a:r>
                     </a:p>
                   </a:txBody>
@@ -13416,7 +13378,7 @@
                           </a:solidFill>
                           <a:latin typeface="맑은 고딕"/>
                         </a:rPr>
-                        <a:t>[진행·완료 — 집행 실수치 병기]</a:t>
+                        <a:t>[진행 중]</a:t>
                       </a:r>
                     </a:p>
                     <a:p>
@@ -13435,7 +13397,7 @@
                           </a:solidFill>
                           <a:latin typeface="맑은 고딕"/>
                         </a:rPr>
-                        <a:t>· 네이버 블로그 체험단: 집행 [기입]건 / 유튜브 숏폼: 조회·전환 [기입]</a:t>
+                        <a:t>· 네이버 스마트스토어 쇼핑검색광고 집행 중</a:t>
                       </a:r>
                     </a:p>
                     <a:p>
@@ -13454,7 +13416,7 @@
                           </a:solidFill>
                           <a:latin typeface="맑은 고딕"/>
                         </a:rPr>
-                        <a:t>· 와디즈 #408720: 얼리버드·한정 리워드 + 알림받기·지지서명 사전모집 (결과 수치는 achievements 참조, 강할 때만 노출)</a:t>
+                        <a:t>· 인플루언서 협업·공동구매 추진 중 / 네이버 블로그 체험단·유튜브 숏폼 캠페인 준비</a:t>
                       </a:r>
                     </a:p>
                     <a:p>
@@ -13473,45 +13435,7 @@
                           </a:solidFill>
                           <a:latin typeface="맑은 고딕"/>
                         </a:rPr>
-                        <a:t/>
-                      </a:r>
-                    </a:p>
-                    <a:p>
-                      <a:pPr algn="l">
-                        <a:lnSpc>
-                          <a:spcPct val="100000"/>
-                        </a:lnSpc>
-                        <a:spcAft>
-                          <a:spcPts val="100"/>
-                        </a:spcAft>
-                      </a:pPr>
-                      <a:r>
-                        <a:rPr sz="750" b="1">
-                          <a:solidFill>
-                            <a:srgbClr val="1F3864"/>
-                          </a:solidFill>
-                          <a:latin typeface="맑은 고딕"/>
-                        </a:rPr>
-                        <a:t>[예산·효율]</a:t>
-                      </a:r>
-                    </a:p>
-                    <a:p>
-                      <a:pPr algn="l">
-                        <a:lnSpc>
-                          <a:spcPct val="100000"/>
-                        </a:lnSpc>
-                        <a:spcAft>
-                          <a:spcPts val="100"/>
-                        </a:spcAft>
-                      </a:pPr>
-                      <a:r>
-                        <a:rPr sz="750">
-                          <a:solidFill>
-                            <a:srgbClr val="212121"/>
-                          </a:solidFill>
-                          <a:latin typeface="맑은 고딕"/>
-                        </a:rPr>
-                        <a:t>· 누적 마케팅 집행 예산 [기입] / 채널별 CPA·ROAS [기입]</a:t>
+                        <a:t>· 스토어 알림받기 쿠폰 + 선착순 한정 프로모션('리커버리 위크') 운영</a:t>
                       </a:r>
                     </a:p>
                     <a:p>
@@ -13568,7 +13492,7 @@
                           </a:solidFill>
                           <a:latin typeface="맑은 고딕"/>
                         </a:rPr>
-                        <a:t>· ① 임상 비자극 인증(기관 각주 세트) ② 병풀잎수 베이스 처방 ③ '단계 줄이기' 사용 전후</a:t>
+                        <a:t>· ① 임상 비자극 0.00 (보고서 번호 각주 세트) ② 병풀잎수 베이스 처방 ③ '단계 줄이고 크림 하나로'</a:t>
                       </a:r>
                     </a:p>
                     <a:p>
@@ -13587,7 +13511,7 @@
                           </a:solidFill>
                           <a:latin typeface="맑은 고딕"/>
                         </a:rPr>
-                        <a:t>※ '재생/EGF/무자극/부작용 없음' 등 확대표현 배제 — 표시광고 가드레일 상시 적용.</a:t>
+                        <a:t>※ '재생·EGF·무자극' 등 확대표현 배제 — 표시광고 가드레일 상시 적용</a:t>
                       </a:r>
                     </a:p>
                   </a:txBody>
@@ -13830,7 +13754,7 @@
                 </a:solidFill>
                 <a:latin typeface="맑은 고딕"/>
               </a:rPr>
-              <a:t>· 슬로보다 No.7 리커버리 크림 / 50ml / 43,000원(정가 48,000원) / 출시일 [기입]</a:t>
+              <a:t>· 슬로보다 No.7 리커버리 크림 / 50ml / 판매가 43,000원 (정가 48,000원) / 출시일 [기입]</a:t>
             </a:r>
           </a:p>
           <a:p>
@@ -13849,7 +13773,7 @@
                 </a:solidFill>
                 <a:latin typeface="맑은 고딕"/>
               </a:rPr>
-              <a:t>· 쿠팡 등록명의 'EGF·재생' 표현 → 정식 성분명·'진정·보습·장벽 케어'로 정정 예정 (심의 리스크 제거)</a:t>
+              <a:t/>
             </a:r>
           </a:p>
           <a:p>
@@ -13862,13 +13786,13 @@
               </a:spcAft>
             </a:pPr>
             <a:r>
-              <a:rPr sz="900">
+              <a:rPr sz="900" b="1">
                 <a:solidFill>
-                  <a:srgbClr val="212121"/>
+                  <a:srgbClr val="1F3864"/>
                 </a:solidFill>
                 <a:latin typeface="맑은 고딕"/>
               </a:rPr>
-              <a:t/>
+              <a:t>[제형·소구 — 심의 가드레일 적용]</a:t>
             </a:r>
           </a:p>
           <a:p>
@@ -13881,13 +13805,13 @@
               </a:spcAft>
             </a:pPr>
             <a:r>
-              <a:rPr sz="900" b="1">
+              <a:rPr sz="900">
                 <a:solidFill>
-                  <a:srgbClr val="1F3864"/>
+                  <a:srgbClr val="212121"/>
                 </a:solidFill>
                 <a:latin typeface="맑은 고딕"/>
               </a:rPr>
-              <a:t>[제형·소구 — 심의 가드레일 적용]</a:t>
+              <a:t>· 병풀잎수 베이스, 진정·보습·피부장벽 케어 데일리 크림 ('재생·EGF' 확대표현은 소구에서 배제)</a:t>
             </a:r>
           </a:p>
           <a:p>
@@ -13906,7 +13830,7 @@
                 </a:solidFill>
                 <a:latin typeface="맑은 고딕"/>
               </a:rPr>
-              <a:t>· 병풀잎수 베이스 처방 + 진정·보습·피부장벽 케어 ('재생/EGF'는 소구축에서 제외, 성분표 표기 수준으로만)</a:t>
+              <a:t>· 무겁지 않은 크림 제형 — 리뷰 키워드로 실증: '끈적임이 없어요' '흡수가 잘 돼요' '발림성 좋아요'</a:t>
             </a:r>
           </a:p>
           <a:p>
@@ -13925,7 +13849,7 @@
                 </a:solidFill>
                 <a:latin typeface="맑은 고딕"/>
               </a:rPr>
-              <a:t>· 매일 바르는 데일리 장벽 크림 — 스킨케어 단계 최소화</a:t>
+              <a:t>· 아침 메이크업 전·저녁 마무리 모두 사용 가능한 데일리 설계</a:t>
             </a:r>
           </a:p>
           <a:p>
@@ -13963,7 +13887,7 @@
                 </a:solidFill>
                 <a:latin typeface="맑은 고딕"/>
               </a:rPr>
-              <a:t>[차별점 — 경쟁 SKU 비교표로 증명(첨부 필수)]</a:t>
+              <a:t>[안전성 근거 — 첨부 성적서 2건]</a:t>
             </a:r>
           </a:p>
           <a:p>
@@ -13982,7 +13906,7 @@
                 </a:solidFill>
                 <a:latin typeface="맑은 고딕"/>
               </a:rPr>
-              <a:t>· 표 축: 4만원대 국산 시카·장벽 크림 SKU(닥터지/아누아/토리든/스킨1004 등) × [병풀 함량·처방형태 / 일반·민감성 이중 임상 유무 / 용량·ml당 단가 / 시술후 소구]</a:t>
+              <a:t>· 일반 피부 첩포 일차자극 인체적용시험: 자극지수 0.00 비자극성(Excellent) — 보고서 No. HM-IR0089-06</a:t>
             </a:r>
           </a:p>
           <a:p>
@@ -14001,7 +13925,7 @@
                 </a:solidFill>
                 <a:latin typeface="맑은 고딕"/>
               </a:rPr>
-              <a:t>· 슬로보다만 채우는 칸: [이중 임상 자극지수 0.00 + 병풀잎수 베이스 + 시술후 리커버리] 교집합 → '이 조합은 없음' 시각 증명</a:t>
+              <a:t>· 민감성 피부 첩포 일차자극 인체적용시험: 자극지수 0.00 비자극성(Excellent) — 보고서 No. HM-IR0088-68</a:t>
             </a:r>
           </a:p>
           <a:p>
@@ -14020,7 +13944,7 @@
                 </a:solidFill>
                 <a:latin typeface="맑은 고딕"/>
               </a:rPr>
-              <a:t/>
+              <a:t>· Finn Chamber® 24시간 첩포 · 패치 제거 후 30분/24시간 피부과전문의 판정</a:t>
             </a:r>
           </a:p>
           <a:p>
@@ -14033,13 +13957,13 @@
               </a:spcAft>
             </a:pPr>
             <a:r>
-              <a:rPr sz="900" b="1">
+              <a:rPr sz="900">
                 <a:solidFill>
-                  <a:srgbClr val="1F3864"/>
+                  <a:srgbClr val="212121"/>
                 </a:solidFill>
                 <a:latin typeface="맑은 고딕"/>
               </a:rPr>
-              <a:t>[매대 구성 — 온/오프 분리]</a:t>
+              <a:t/>
             </a:r>
           </a:p>
           <a:p>
@@ -14052,13 +13976,13 @@
               </a:spcAft>
             </a:pPr>
             <a:r>
-              <a:rPr sz="900">
+              <a:rPr sz="900" b="1">
                 <a:solidFill>
-                  <a:srgbClr val="212121"/>
+                  <a:srgbClr val="1F3864"/>
                 </a:solidFill>
                 <a:latin typeface="맑은 고딕"/>
               </a:rPr>
-              <a:t>· 온라인 진입: 히어로 1 SKU 집중(미니멀 컨셉 강화)</a:t>
+              <a:t>[차별점 — 경쟁 SKU 비교표(부록 A)]</a:t>
             </a:r>
           </a:p>
           <a:p>
@@ -14077,7 +14001,7 @@
                 </a:solidFill>
                 <a:latin typeface="맑은 고딕"/>
               </a:rPr>
-              <a:t>· 오프라인 확대: 본품 50ml + 미니(트래블) + 리필 = 동일 히어로 용량 변주로 브랜드존 방어 (앰플·클렌저 등 신규 카테고리는 실적 후)</a:t>
+              <a:t>· 비교 축: 병풀 함량·처방형태 / 일반·민감성 이중 임상 유무 / 용량·ml당 단가 / 시술후 소구 / 병원 채널 검증</a:t>
             </a:r>
           </a:p>
           <a:p>
@@ -14096,7 +14020,7 @@
                 </a:solidFill>
                 <a:latin typeface="맑은 고딕"/>
               </a:rPr>
-              <a:t/>
+              <a:t>· 슬로보다만 채우는 칸: 이중 임상 0.00 + 병풀잎수 베이스 + 시술후 리커버리 + 병원 판매 이력</a:t>
             </a:r>
           </a:p>
           <a:p>
@@ -14109,13 +14033,13 @@
               </a:spcAft>
             </a:pPr>
             <a:r>
-              <a:rPr sz="900" b="1">
+              <a:rPr sz="900">
                 <a:solidFill>
-                  <a:srgbClr val="1F3864"/>
+                  <a:srgbClr val="212121"/>
                 </a:solidFill>
                 <a:latin typeface="맑은 고딕"/>
               </a:rPr>
-              <a:t>[가격 정당화 — 함량이 아니라 사용맥락]</a:t>
+              <a:t/>
             </a:r>
           </a:p>
           <a:p>
@@ -14128,13 +14052,13 @@
               </a:spcAft>
             </a:pPr>
             <a:r>
-              <a:rPr sz="900">
+              <a:rPr sz="900" b="1">
                 <a:solidFill>
-                  <a:srgbClr val="212121"/>
+                  <a:srgbClr val="1F3864"/>
                 </a:solidFill>
                 <a:latin typeface="맑은 고딕"/>
               </a:rPr>
-              <a:t>· '시술비 20~30만원 → 4.3만원 홈케어' 앵커링 + ml당 단가 비교표로 라로슈포제 대비 우위</a:t>
+              <a:t>[매대 구성]</a:t>
             </a:r>
           </a:p>
           <a:p>
@@ -14153,7 +14077,7 @@
                 </a:solidFill>
                 <a:latin typeface="맑은 고딕"/>
               </a:rPr>
-              <a:t>· 첫구매 쿠폰·미니 SKU로 체감 3만원대 진입가 설계 (정가 훼손이 아닌 '진입 문턱' 설계)</a:t>
+              <a:t>· 온라인 진입: 히어로 1 SKU 집중 / 오프라인 확대 시: 본품 + 미니(트래블) + 리필 용량 변주</a:t>
             </a:r>
           </a:p>
           <a:p>
@@ -14191,7 +14115,7 @@
                 </a:solidFill>
                 <a:latin typeface="맑은 고딕"/>
               </a:rPr>
-              <a:t>[첨부 이미지 4종 必 — 실제 이미지 [기입]]</a:t>
+              <a:t>[가격 정당화]</a:t>
             </a:r>
           </a:p>
           <a:p>
@@ -14210,7 +14134,64 @@
                 </a:solidFill>
                 <a:latin typeface="맑은 고딕"/>
               </a:rPr>
-              <a:t>· ① 제품 단독컷 ② 임상 인증 그래픽(기관명 포함) ③ 병풀잎수 처방 클로즈업 ④ 시술 후 사용 시나리오컷</a:t>
+              <a:t>· 시술비 20~30만원 → 4.3만원 홈케어 앵커링 / 첫구매 쿠폰·미니 SKU로 진입 문턱 완화</a:t>
+            </a:r>
+          </a:p>
+          <a:p>
+            <a:pPr algn="l">
+              <a:lnSpc>
+                <a:spcPct val="100000"/>
+              </a:lnSpc>
+              <a:spcAft>
+                <a:spcPts val="100"/>
+              </a:spcAft>
+            </a:pPr>
+            <a:r>
+              <a:rPr sz="900">
+                <a:solidFill>
+                  <a:srgbClr val="212121"/>
+                </a:solidFill>
+                <a:latin typeface="맑은 고딕"/>
+              </a:rPr>
+              <a:t/>
+            </a:r>
+          </a:p>
+          <a:p>
+            <a:pPr algn="l">
+              <a:lnSpc>
+                <a:spcPct val="100000"/>
+              </a:lnSpc>
+              <a:spcAft>
+                <a:spcPts val="100"/>
+              </a:spcAft>
+            </a:pPr>
+            <a:r>
+              <a:rPr sz="900" b="1">
+                <a:solidFill>
+                  <a:srgbClr val="1F3864"/>
+                </a:solidFill>
+                <a:latin typeface="맑은 고딕"/>
+              </a:rPr>
+              <a:t>[첨부 이미지 4종]</a:t>
+            </a:r>
+          </a:p>
+          <a:p>
+            <a:pPr algn="l">
+              <a:lnSpc>
+                <a:spcPct val="100000"/>
+              </a:lnSpc>
+              <a:spcAft>
+                <a:spcPts val="100"/>
+              </a:spcAft>
+            </a:pPr>
+            <a:r>
+              <a:rPr sz="900">
+                <a:solidFill>
+                  <a:srgbClr val="212121"/>
+                </a:solidFill>
+                <a:latin typeface="맑은 고딕"/>
+              </a:rPr>
+              <a:t>· ① 제품 단독컷 ② 임상 성적서 그래픽 ③ 병풀잎수 처방 클로즈업 ④ 시술 후 사용 시나리오컷 [이미지 기입]</a:t>
             </a:r>
           </a:p>
         </p:txBody>
@@ -14386,7 +14367,7 @@
                 </a:solidFill>
                 <a:latin typeface="맑은 고딕"/>
               </a:rPr>
-              <a:t>[방향 — 신생 인지도 약점 상쇄]</a:t>
+              <a:t>[방향 — 광고 투자 확대 국면]</a:t>
             </a:r>
           </a:p>
           <a:p>
@@ -14405,7 +14386,7 @@
                 </a:solidFill>
                 <a:latin typeface="맑은 고딕"/>
               </a:rPr>
-              <a:t>· 브랜드+제품 키워드 점유 + 후기 볼륨 확보 최우선</a:t>
+              <a:t>· 브랜드는 지금 마케팅 투자를 본격 확대하는 시점: 스마트스토어 광고 증액 + 인플루언서 협업·공동구매 + 체험단·숏폼 (예산 [기입])</a:t>
             </a:r>
           </a:p>
           <a:p>
@@ -14424,7 +14405,7 @@
                 </a:solidFill>
                 <a:latin typeface="맑은 고딕"/>
               </a:rPr>
-              <a:t>· 3대 메시지(임상 비자극 / 병풀잎수 베이스 / 크림 하나)로 통일된 캠페인</a:t>
+              <a:t>· 3대 메시지(임상 비자극 / 병풀잎수 / 크림 하나)로 통일된 캠페인 운영</a:t>
             </a:r>
           </a:p>
           <a:p>
@@ -14462,7 +14443,7 @@
                 </a:solidFill>
                 <a:latin typeface="맑은 고딕"/>
               </a:rPr>
-              <a:t>[실행]</a:t>
+              <a:t>[올리브영 연계 — 브랜드가 리스크를 부담]</a:t>
             </a:r>
           </a:p>
           <a:p>
@@ -14481,7 +14462,7 @@
                 </a:solidFill>
                 <a:latin typeface="맑은 고딕"/>
               </a:rPr>
-              <a:t>· 블로그 체험단·유튜브 숏폼·크리에이터 공동구매</a:t>
+              <a:t>· 위 광고·인플루언서 트래픽의 구매 착지점을 올리브영으로 설정 — 브랜드 광고비로 만든 수요가 올리브영 매출로 전환되는 구조</a:t>
             </a:r>
           </a:p>
           <a:p>
@@ -14500,7 +14481,7 @@
                 </a:solidFill>
                 <a:latin typeface="맑은 고딕"/>
               </a:rPr>
-              <a:t>· '리커버리 위크' 선착순 + 알림받기 쿠폰 + 임상 인증 리뷰 이벤트로 첫구매·리뷰 임계치 확보</a:t>
+              <a:t>· 온라인몰 입점 시 초도 리뷰 100건+ 브랜드 비용으로 확보</a:t>
             </a:r>
           </a:p>
           <a:p>
@@ -14519,7 +14500,7 @@
                 </a:solidFill>
                 <a:latin typeface="맑은 고딕"/>
               </a:rPr>
-              <a:t>· 첫구매 쿠폰·미니 SKU로 가격 저항 완화(체감 3만원대 진입)</a:t>
+              <a:t>· 올리브영 전용 기획전·오늘드림·리뷰 이벤트 연동</a:t>
             </a:r>
           </a:p>
           <a:p>
@@ -14538,7 +14519,7 @@
                 </a:solidFill>
                 <a:latin typeface="맑은 고딕"/>
               </a:rPr>
-              <a:t/>
+              <a:t>· CS 전담·반품 대응·패치테스트 권고 문구로 민감피부 클레임 선제 차단</a:t>
             </a:r>
           </a:p>
           <a:p>
@@ -14551,13 +14532,13 @@
               </a:spcAft>
             </a:pPr>
             <a:r>
-              <a:rPr sz="800" b="1">
+              <a:rPr sz="800">
                 <a:solidFill>
-                  <a:srgbClr val="1F3864"/>
+                  <a:srgbClr val="212121"/>
                 </a:solidFill>
                 <a:latin typeface="맑은 고딕"/>
               </a:rPr>
-              <a:t>[올리브영 연계 — 브랜드가 리스크를 부담]</a:t>
+              <a:t/>
             </a:r>
           </a:p>
           <a:p>
@@ -14570,13 +14551,13 @@
               </a:spcAft>
             </a:pPr>
             <a:r>
-              <a:rPr sz="800">
+              <a:rPr sz="800" b="1">
                 <a:solidFill>
-                  <a:srgbClr val="212121"/>
+                  <a:srgbClr val="1F3864"/>
                 </a:solidFill>
                 <a:latin typeface="맑은 고딕"/>
               </a:rPr>
-              <a:t>· 온라인몰 입점 시 초도 리뷰 [목표 100건]을 브랜드 비용으로 확보 → 데이터 리스크를 브랜드가 짐</a:t>
+              <a:t>[올리브영 입점 희망 이유 — MD 관점의 이익]</a:t>
             </a:r>
           </a:p>
           <a:p>
@@ -14589,13 +14570,13 @@
               </a:spcAft>
             </a:pPr>
             <a:r>
-              <a:rPr sz="800">
+              <a:rPr sz="800" b="1">
                 <a:solidFill>
-                  <a:srgbClr val="212121"/>
+                  <a:srgbClr val="1F3864"/>
                 </a:solidFill>
                 <a:latin typeface="맑은 고딕"/>
               </a:rPr>
-              <a:t>· 전용 기획전·오늘드림·리뷰 이벤트 연동 예산 [기입]</a:t>
+              <a:t>[MD 관점의 이익]</a:t>
             </a:r>
           </a:p>
           <a:p>
@@ -14614,7 +14595,7 @@
                 </a:solidFill>
                 <a:latin typeface="맑은 고딕"/>
               </a:rPr>
-              <a:t>· CS 전담·반품 3PL·패치테스트 권고 문구로 민감피부 클레임 선제 차단</a:t>
+              <a:t>· ① 브랜드가 만든 트래픽의 '착지 매대': 인플루언서·공구·광고 수요는 소비자가 신뢰하는 매대에서 구매로 완결됨 — 광고비는 브랜드가 쓰고, 전환 매출은 올리브영에 순증. 지금이 광고 투자 확대 직전 시점 = 입점 타이밍이 곧 매출 타이밍</a:t>
             </a:r>
           </a:p>
           <a:p>
@@ -14633,7 +14614,7 @@
                 </a:solidFill>
                 <a:latin typeface="맑은 고딕"/>
               </a:rPr>
-              <a:t>· 총 예산·월 배분 [기입]</a:t>
+              <a:t>· ② 매대 '순증'(대체 아님): [병풀잎수 베이스 + 이중 임상 0.00 + 시술후 리커버리 + 병원 검증] 조합은 기존 매대에 없음 (부록 A 비교표)</a:t>
             </a:r>
           </a:p>
           <a:p>
@@ -14652,7 +14633,7 @@
                 </a:solidFill>
                 <a:latin typeface="맑은 고딕"/>
               </a:rPr>
-              <a:t/>
+              <a:t>· ③ '시술후케어' 슬롯 정확 타격: 검색 수요는 크지만 매대 대응은 얇은 슬롯 — 병원 발(發) 브랜드 스토리가 그대로 소구</a:t>
             </a:r>
           </a:p>
           <a:p>
@@ -14665,13 +14646,13 @@
               </a:spcAft>
             </a:pPr>
             <a:r>
-              <a:rPr sz="800" b="1">
+              <a:rPr sz="800">
                 <a:solidFill>
-                  <a:srgbClr val="1F3864"/>
+                  <a:srgbClr val="212121"/>
                 </a:solidFill>
                 <a:latin typeface="맑은 고딕"/>
               </a:rPr>
-              <a:t>[올리브영 입점 희망 이유 — MD 관점의 이익]</a:t>
+              <a:t>· ④ 리스크는 브랜드 부담: 온라인몰 단독 선입점(저리스크) + 초도 리뷰 100건 브랜드 비용 + 재공급 보증</a:t>
             </a:r>
           </a:p>
           <a:p>
@@ -14684,127 +14665,13 @@
               </a:spcAft>
             </a:pPr>
             <a:r>
-              <a:rPr sz="800" b="1">
-                <a:solidFill>
-                  <a:srgbClr val="1F3864"/>
-                </a:solidFill>
-                <a:latin typeface="맑은 고딕"/>
-              </a:rPr>
-              <a:t>[MD 이익 언어로 재작성 — '인지도 상승'은 브랜드 이익, 아래는 MD 이익]</a:t>
-            </a:r>
-          </a:p>
-          <a:p>
-            <a:pPr algn="l">
-              <a:lnSpc>
-                <a:spcPct val="100000"/>
-              </a:lnSpc>
-              <a:spcAft>
-                <a:spcPts val="100"/>
-              </a:spcAft>
-            </a:pPr>
-            <a:r>
               <a:rPr sz="800">
                 <a:solidFill>
                   <a:srgbClr val="212121"/>
                 </a:solidFill>
                 <a:latin typeface="맑은 고딕"/>
               </a:rPr>
-              <a:t>· ① 매대 순증(대체 아님): 경쟁 SKU 비교표로 '병풀 베이스 + 이중 임상 + 시술후' 교집합 부재를 사실 증명 → 기존 라인 잠식 없이 슬롯 순증</a:t>
-            </a:r>
-          </a:p>
-          <a:p>
-            <a:pPr algn="l">
-              <a:lnSpc>
-                <a:spcPct val="100000"/>
-              </a:lnSpc>
-              <a:spcAft>
-                <a:spcPts val="100"/>
-              </a:spcAft>
-            </a:pPr>
-            <a:r>
-              <a:rPr sz="800">
-                <a:solidFill>
-                  <a:srgbClr val="212121"/>
-                </a:solidFill>
-                <a:latin typeface="맑은 고딕"/>
-              </a:rPr>
-              <a:t>· ② '검색은 뜨는데 매대엔 약한' 슬롯 지목: 시술후 리커버리 + 병풀·시카(마데카소사이드·센텔라 판매 상위권). 자사 성분과 직결된 올리브영 실판매·검색 데이터로 근거화 (※PDRN 등 무관 성분 성장률 인용은 삭제)</a:t>
-            </a:r>
-          </a:p>
-          <a:p>
-            <a:pPr algn="l">
-              <a:lnSpc>
-                <a:spcPct val="100000"/>
-              </a:lnSpc>
-              <a:spcAft>
-                <a:spcPts val="100"/>
-              </a:spcAft>
-            </a:pPr>
-            <a:r>
-              <a:rPr sz="800">
-                <a:solidFill>
-                  <a:srgbClr val="212121"/>
-                </a:solidFill>
-                <a:latin typeface="맑은 고딕"/>
-              </a:rPr>
-              <a:t>· ③ 데이터 리스크를 브랜드가 부담: 온라인몰 초도 리뷰 100건 브랜드 비용 확보 + 재구매율로 회전율 선증명</a:t>
-            </a:r>
-          </a:p>
-          <a:p>
-            <a:pPr algn="l">
-              <a:lnSpc>
-                <a:spcPct val="100000"/>
-              </a:lnSpc>
-              <a:spcAft>
-                <a:spcPts val="100"/>
-              </a:spcAft>
-            </a:pPr>
-            <a:r>
-              <a:rPr sz="800">
-                <a:solidFill>
-                  <a:srgbClr val="212121"/>
-                </a:solidFill>
-                <a:latin typeface="맑은 고딕"/>
-              </a:rPr>
-              <a:t>· ④ 결품·품질 리스크 방어: CGMP·PL보험·재공급 보증(안전재고 상시)으로 올리브영 무부담 구조</a:t>
-            </a:r>
-          </a:p>
-          <a:p>
-            <a:pPr algn="l">
-              <a:lnSpc>
-                <a:spcPct val="100000"/>
-              </a:lnSpc>
-              <a:spcAft>
-                <a:spcPts val="100"/>
-              </a:spcAft>
-            </a:pPr>
-            <a:r>
-              <a:rPr sz="800">
-                <a:solidFill>
-                  <a:srgbClr val="212121"/>
-                </a:solidFill>
-                <a:latin typeface="맑은 고딕"/>
-              </a:rPr>
-              <a:t>· ⑤ 저리스크 진입: 오프라인이 아닌 '온라인몰 단독 입점'으로 목표 하향 → 슬롯·리뷰관리 부담을 MD가 판단할 수 있는 최소 단위로 제안</a:t>
-            </a:r>
-          </a:p>
-          <a:p>
-            <a:pPr algn="l">
-              <a:lnSpc>
-                <a:spcPct val="100000"/>
-              </a:lnSpc>
-              <a:spcAft>
-                <a:spcPts val="100"/>
-              </a:spcAft>
-            </a:pPr>
-            <a:r>
-              <a:rPr sz="800">
-                <a:solidFill>
-                  <a:srgbClr val="212121"/>
-                </a:solidFill>
-                <a:latin typeface="맑은 고딕"/>
-              </a:rPr>
-              <a:t>· ⑥ 인바운드·글로벌 접점: 병풀 베이스 + 임상은 외국인 구매 이유 명확 → 글로벌몰 역직구 연결(국내 실적 후)</a:t>
+              <a:t>· ⑤ 해외 확장 동행: 해외 판매 계획의 첫 관문을 올리브영 글로벌몰과 함께 — 인바운드 K-더마 수요 흡수</a:t>
             </a:r>
           </a:p>
         </p:txBody>
@@ -14961,7 +14828,7 @@
                 </a:solidFill>
                 <a:latin typeface="맑은 고딕"/>
               </a:rPr>
-              <a:t>[1. 시장 근거 — 출처 없는 통계는 삭제, 1차 출처만 인용]</a:t>
+              <a:t>[1. 시장 근거 — 1차 출처만 인용]</a:t>
             </a:r>
           </a:p>
           <a:p>
@@ -14980,7 +14847,7 @@
                 </a:solidFill>
                 <a:latin typeface="맑은 고딕"/>
               </a:rPr>
-              <a:t>· '민감성 인식 87%' '시장 5조·CAGR 14%' 등은 반드시 [기관·리포트명·연도] 명기 후 인용, 확인 불가 시 삭제</a:t>
+              <a:t>· 올리브영 내 병풀·시카(센텔라/마데카소사이드) 성분 카테고리는 스킨케어 스테디 상위권 — 자사 성분과 직결된 실판매·검색 데이터 캡처 [기입]</a:t>
             </a:r>
           </a:p>
           <a:p>
@@ -14999,7 +14866,7 @@
                 </a:solidFill>
                 <a:latin typeface="맑은 고딕"/>
               </a:rPr>
-              <a:t>· 자사 성분 직결 근거만 사용: 올리브영 내 병풀·시카(마데카소사이드/센텔라) 판매 상위 + '시술후케어' 검색 슬롯 (실데이터 캡처 [기입])</a:t>
+              <a:t>· '시술후케어' 검색·수요 슬롯: 미용시술 대중화로 검색은 크지만 매대 대응은 얇음</a:t>
             </a:r>
           </a:p>
           <a:p>
@@ -15018,7 +14885,7 @@
                 </a:solidFill>
                 <a:latin typeface="맑은 고딕"/>
               </a:rPr>
-              <a:t>· ※PDRN 검색 성장률 등 이 제품에 없는 성분 데이터 인용은 삭제 (논리 비약, MD 즉시 간파)</a:t>
+              <a:t>· 시장 통계 인용 시 [기관·리포트명·연도] 명기 — 확인 불가 수치는 미기재 원칙</a:t>
             </a:r>
           </a:p>
           <a:p>
@@ -15056,7 +14923,7 @@
                 </a:solidFill>
                 <a:latin typeface="맑은 고딕"/>
               </a:rPr>
-              <a:t>[2. 경쟁 SKU 비교표(첨부 필수) — '공백' 주장을 사실로]</a:t>
+              <a:t>[2. 경쟁 SKU 비교표 — '이 조합은 없음'을 사실로]</a:t>
             </a:r>
           </a:p>
           <a:p>
@@ -15075,7 +14942,7 @@
                 </a:solidFill>
                 <a:latin typeface="맑은 고딕"/>
               </a:rPr>
-              <a:t>· 4만원대 국산 시카·장벽 크림 실제 SKU 리스트업(닥터지/아누아/토리든/스킨1004 등)</a:t>
+              <a:t>· 4만원대 국산 시카·장벽 크림 리스트업(닥터지/아누아/토리든/스킨1004 등)</a:t>
             </a:r>
           </a:p>
           <a:p>
@@ -15094,7 +14961,7 @@
                 </a:solidFill>
                 <a:latin typeface="맑은 고딕"/>
               </a:rPr>
-              <a:t>· 비교 축: 병풀 함량·처방형태 / 일반·민감성 이중 임상 유무 / 용량·ml당 단가 / 시술후 소구</a:t>
+              <a:t>· 비교 축: 병풀 함량·처방형태 / 일반·민감성 이중 임상 유무 / 용량·ml당 단가 / 시술후 소구 / 병원 채널 검증</a:t>
             </a:r>
           </a:p>
           <a:p>
@@ -15113,7 +14980,7 @@
                 </a:solidFill>
                 <a:latin typeface="맑은 고딕"/>
               </a:rPr>
-              <a:t>· 결론 칸: 슬로보다만 채우는 [이중 임상 자극지수 0.00 + 병풀잎수 베이스 + 시술후 리커버리] 교집합</a:t>
+              <a:t>· 슬로보다만 채우는 칸: 이중 임상 자극지수 0.00(보고서 2건) + 병풀잎수 베이스 + 시술후 리커버리 + 병원 판매 이력</a:t>
             </a:r>
           </a:p>
           <a:p>
@@ -15151,7 +15018,7 @@
                 </a:solidFill>
                 <a:latin typeface="맑은 고딕"/>
               </a:rPr>
-              <a:t>[3. 올리브영 온라인 단독 런칭 플랜 — 목표 하향(채택확률↑)]</a:t>
+              <a:t>[3. 올리브영 런칭 플랜 — 온라인 단독 선입점(저리스크)]</a:t>
             </a:r>
           </a:p>
           <a:p>
@@ -15170,7 +15037,7 @@
                 </a:solidFill>
                 <a:latin typeface="맑은 고딕"/>
               </a:rPr>
-              <a:t>· 1단계(0~3개월): 온라인몰 단독 입점 + 기획전 → 초도 리뷰 100건(브랜드 비용)·재구매율로 회전율 증명</a:t>
+              <a:t>· 1단계(0~3개월): 온라인몰 단독 입점 + 기획전 → 초도 리뷰 100건+(브랜드 비용)·재구매율로 회전율 증명 · 광고/인플루언서 트래픽을 올리브영 착지로 연결</a:t>
             </a:r>
           </a:p>
           <a:p>
@@ -15189,7 +15056,7 @@
                 </a:solidFill>
                 <a:latin typeface="맑은 고딕"/>
               </a:rPr>
-              <a:t>· 2단계(3~6개월): 지표 달성 시 오프라인 소수 매장 테스트, 초도 2~3 SKU(본품+미니+리필) 브랜드존</a:t>
+              <a:t>· 2단계(3~6개월): 지표 달성 시 더마·진정존 소수 매장 테스트 (본품+미니+리필)</a:t>
             </a:r>
           </a:p>
           <a:p>
@@ -15208,7 +15075,7 @@
                 </a:solidFill>
                 <a:latin typeface="맑은 고딕"/>
               </a:rPr>
-              <a:t>· 3단계(6개월~): 실적 근거로 전점·글로벌몰 확대</a:t>
+              <a:t>· 3단계(6개월~): 매장 확대 + 글로벌몰 역직구로 해외 진출 연계</a:t>
             </a:r>
           </a:p>
           <a:p>
@@ -15227,7 +15094,7 @@
                 </a:solidFill>
                 <a:latin typeface="맑은 고딕"/>
               </a:rPr>
-              <a:t>· 병행: '즐거운 동행'·'K-슈퍼루키 위드영' 프로그램 동시 지원</a:t>
+              <a:t>· 병행: '즐거운 동행' / 'K-슈퍼루키 위드영' 프로그램 동시 지원</a:t>
             </a:r>
           </a:p>
         </p:txBody>
@@ -15384,7 +15251,7 @@
                 </a:solidFill>
                 <a:latin typeface="맑은 고딕"/>
               </a:rPr>
-              <a:t>[4. 공급·품질 준비도 — '결품'·'사고' 공포 선제 해소]</a:t>
+              <a:t>[4. 공급·품질 준비도]</a:t>
             </a:r>
           </a:p>
           <a:p>
@@ -15403,7 +15270,7 @@
                 </a:solidFill>
                 <a:latin typeface="맑은 고딕"/>
               </a:rPr>
-              <a:t>· 제조 허니스트: CGMP·ISO22716 [확인·명기]</a:t>
+              <a:t>· 제조 허니스트 — CGMP·ISO22716 [확인·명기] / 월 캐파·MOQ·리드타임 [기입] / 완판 시 재공급 보증·안전재고 [기입]</a:t>
             </a:r>
           </a:p>
           <a:p>
@@ -15422,7 +15289,7 @@
                 </a:solidFill>
                 <a:latin typeface="맑은 고딕"/>
               </a:rPr>
-              <a:t>· 월 캐파 [기입] / MOQ [기입] / 리드타임 [기입]주 / 완판 시 [기입]주 내 재공급 보증 + 안전재고 [기입]개 상시</a:t>
+              <a:t>· 화장품책임판매업 등록(제이아이에스 주식회사)·PL보험 [기입] / 로트별 CoA·안정성·미생물 성적 제출 가능</a:t>
             </a:r>
           </a:p>
           <a:p>
@@ -15441,7 +15308,7 @@
                 </a:solidFill>
                 <a:latin typeface="맑은 고딕"/>
               </a:rPr>
-              <a:t>· 화장품책임판매업 등록·PL보험 가입 [기입] / 로트별 CoA·안정성·미생물 성적 상시 제출</a:t>
+              <a:t>· 인체적용시험 성적서 2건 원문 상시 제출: HM-IR0089-06(일반)·HM-IR0088-68(민감성) — 모두 자극지수 0.00 비자극성(Excellent)</a:t>
             </a:r>
           </a:p>
           <a:p>
@@ -15460,7 +15327,7 @@
                 </a:solidFill>
                 <a:latin typeface="맑은 고딕"/>
               </a:rPr>
-              <a:t>· CS 전담·반품 3PL·알러지 클레임 SOP + 패치테스트 권고·전성분 상세 고지 (민감피부 타깃 클레임 선제 차단)</a:t>
+              <a:t>· CS 전담·반품 대응·패치테스트 권고 고지 — 민감피부 클레임 선제 차단</a:t>
             </a:r>
           </a:p>
           <a:p>
@@ -15498,7 +15365,7 @@
                 </a:solidFill>
                 <a:latin typeface="맑은 고딕"/>
               </a:rPr>
-              <a:t>[5. 마진·수익성 — '입점 후 이익 나는가' 사전검증]</a:t>
+              <a:t>[5. 마진·매출 시나리오]</a:t>
             </a:r>
           </a:p>
           <a:p>
@@ -15517,7 +15384,7 @@
                 </a:solidFill>
                 <a:latin typeface="맑은 고딕"/>
               </a:rPr>
-              <a:t>· 제품 원가 [기입] 기준, 올리브영 유통마진·물류·EDI·판촉분담 반영 후 영업이익률 [기입]% 확보 검증</a:t>
+              <a:t>· 원가 [기입] 기준 올리브영 수수료·물류 반영 후 영업이익률 [기입]% 사전 검증 / 쿠폰 분담 여력 [기입]</a:t>
             </a:r>
           </a:p>
           <a:p>
@@ -15536,102 +15403,7 @@
                 </a:solidFill>
                 <a:latin typeface="맑은 고딕"/>
               </a:rPr>
-              <a:t>· 첫구매 쿠폰 분담 여력 [기입]원 내 설계 → 판촉비 소진 후 이탈 리스크 차단</a:t>
-            </a:r>
-          </a:p>
-          <a:p>
-            <a:pPr algn="l">
-              <a:lnSpc>
-                <a:spcPct val="100000"/>
-              </a:lnSpc>
-              <a:spcAft>
-                <a:spcPts val="100"/>
-              </a:spcAft>
-            </a:pPr>
-            <a:r>
-              <a:rPr sz="850">
-                <a:solidFill>
-                  <a:srgbClr val="212121"/>
-                </a:solidFill>
-                <a:latin typeface="맑은 고딕"/>
-              </a:rPr>
-              <a:t/>
-            </a:r>
-          </a:p>
-          <a:p>
-            <a:pPr algn="l">
-              <a:lnSpc>
-                <a:spcPct val="100000"/>
-              </a:lnSpc>
-              <a:spcAft>
-                <a:spcPts val="100"/>
-              </a:spcAft>
-            </a:pPr>
-            <a:r>
-              <a:rPr sz="850" b="1">
-                <a:solidFill>
-                  <a:srgbClr val="1F3864"/>
-                </a:solidFill>
-                <a:latin typeface="맑은 고딕"/>
-              </a:rPr>
-              <a:t>[6. 완결 매출 시나리오 — 최소 1개는 실수치로(빈 프레임워크 금지)]</a:t>
-            </a:r>
-          </a:p>
-          <a:p>
-            <a:pPr algn="l">
-              <a:lnSpc>
-                <a:spcPct val="100000"/>
-              </a:lnSpc>
-              <a:spcAft>
-                <a:spcPts val="100"/>
-              </a:spcAft>
-            </a:pPr>
-            <a:r>
-              <a:rPr sz="850">
-                <a:solidFill>
-                  <a:srgbClr val="212121"/>
-                </a:solidFill>
-                <a:latin typeface="맑은 고딕"/>
-              </a:rPr>
-              <a:t>· 자사 온라인 실판매 데이터로 보수 가정 1개 시나리오를 '완결된 숫자'로 제시 (값을 못 채우면 이 슬라이드는 통째 삭제)</a:t>
-            </a:r>
-          </a:p>
-          <a:p>
-            <a:pPr algn="l">
-              <a:lnSpc>
-                <a:spcPct val="100000"/>
-              </a:lnSpc>
-              <a:spcAft>
-                <a:spcPts val="100"/>
-              </a:spcAft>
-            </a:pPr>
-            <a:r>
-              <a:rPr sz="850">
-                <a:solidFill>
-                  <a:srgbClr val="212121"/>
-                </a:solidFill>
-                <a:latin typeface="맑은 고딕"/>
-              </a:rPr>
-              <a:t>· 프레임(협상 테이블 즉시 대입용): 월 소매매출 = 43,000원 × 매대당 일판매 q × 매장수 N × 25일 / 재구매율·회전일 반영 순증</a:t>
-            </a:r>
-          </a:p>
-          <a:p>
-            <a:pPr algn="l">
-              <a:lnSpc>
-                <a:spcPct val="100000"/>
-              </a:lnSpc>
-              <a:spcAft>
-                <a:spcPts val="100"/>
-              </a:spcAft>
-            </a:pPr>
-            <a:r>
-              <a:rPr sz="850">
-                <a:solidFill>
-                  <a:srgbClr val="212121"/>
-                </a:solidFill>
-                <a:latin typeface="맑은 고딕"/>
-              </a:rPr>
-              <a:t>· 변수 실측 대입 필수: N=[기입], q=[보수 가정·기입], 회전일 [기입], 재구매율 [기입] — 확정 전까지는 슬라이드 노출 보류. 허위 수치 금지.</a:t>
+              <a:t>· 보수 시나리오(변수 실측 후 확정): 월 매출 = 43,000원 × 일판매 q × 매장(슬롯) N × 25일 — N·q·회전일·재구매율 [기입]</a:t>
             </a:r>
           </a:p>
         </p:txBody>
